--- a/03_Reporter/Pre_cs_basicEEG.pptx
+++ b/03_Reporter/Pre_cs_basicEEG.pptx
@@ -113,6 +113,11 @@
       </a:defRPr>
     </a:lvl9pPr>
   </p:defaultTextStyle>
+  <p:extLst>
+    <p:ext uri="{EFAFB233-063F-42B5-8137-9DF3F51BA10A}">
+      <p15:sldGuideLst xmlns:p15="http://schemas.microsoft.com/office/powerpoint/2012/main"/>
+    </p:ext>
+  </p:extLst>
 </p:presentation>
 </file>
 
@@ -265,7 +270,7 @@
           <a:p>
             <a:fld id="{1C654D52-FA64-924F-BDBD-5D442C1F7DEB}" type="datetimeFigureOut">
               <a:rPr lang="en-CN" smtClean="0"/>
-              <a:t>2026/6/12</a:t>
+              <a:t>2026/6/13</a:t>
             </a:fld>
             <a:endParaRPr lang="en-CN"/>
           </a:p>
@@ -465,7 +470,7 @@
           <a:p>
             <a:fld id="{1C654D52-FA64-924F-BDBD-5D442C1F7DEB}" type="datetimeFigureOut">
               <a:rPr lang="en-CN" smtClean="0"/>
-              <a:t>2026/6/12</a:t>
+              <a:t>2026/6/13</a:t>
             </a:fld>
             <a:endParaRPr lang="en-CN"/>
           </a:p>
@@ -675,7 +680,7 @@
           <a:p>
             <a:fld id="{1C654D52-FA64-924F-BDBD-5D442C1F7DEB}" type="datetimeFigureOut">
               <a:rPr lang="en-CN" smtClean="0"/>
-              <a:t>2026/6/12</a:t>
+              <a:t>2026/6/13</a:t>
             </a:fld>
             <a:endParaRPr lang="en-CN"/>
           </a:p>
@@ -875,7 +880,7 @@
           <a:p>
             <a:fld id="{1C654D52-FA64-924F-BDBD-5D442C1F7DEB}" type="datetimeFigureOut">
               <a:rPr lang="en-CN" smtClean="0"/>
-              <a:t>2026/6/12</a:t>
+              <a:t>2026/6/13</a:t>
             </a:fld>
             <a:endParaRPr lang="en-CN"/>
           </a:p>
@@ -1151,7 +1156,7 @@
           <a:p>
             <a:fld id="{1C654D52-FA64-924F-BDBD-5D442C1F7DEB}" type="datetimeFigureOut">
               <a:rPr lang="en-CN" smtClean="0"/>
-              <a:t>2026/6/12</a:t>
+              <a:t>2026/6/13</a:t>
             </a:fld>
             <a:endParaRPr lang="en-CN"/>
           </a:p>
@@ -1419,7 +1424,7 @@
           <a:p>
             <a:fld id="{1C654D52-FA64-924F-BDBD-5D442C1F7DEB}" type="datetimeFigureOut">
               <a:rPr lang="en-CN" smtClean="0"/>
-              <a:t>2026/6/12</a:t>
+              <a:t>2026/6/13</a:t>
             </a:fld>
             <a:endParaRPr lang="en-CN"/>
           </a:p>
@@ -1834,7 +1839,7 @@
           <a:p>
             <a:fld id="{1C654D52-FA64-924F-BDBD-5D442C1F7DEB}" type="datetimeFigureOut">
               <a:rPr lang="en-CN" smtClean="0"/>
-              <a:t>2026/6/12</a:t>
+              <a:t>2026/6/13</a:t>
             </a:fld>
             <a:endParaRPr lang="en-CN"/>
           </a:p>
@@ -1976,7 +1981,7 @@
           <a:p>
             <a:fld id="{1C654D52-FA64-924F-BDBD-5D442C1F7DEB}" type="datetimeFigureOut">
               <a:rPr lang="en-CN" smtClean="0"/>
-              <a:t>2026/6/12</a:t>
+              <a:t>2026/6/13</a:t>
             </a:fld>
             <a:endParaRPr lang="en-CN"/>
           </a:p>
@@ -2089,7 +2094,7 @@
           <a:p>
             <a:fld id="{1C654D52-FA64-924F-BDBD-5D442C1F7DEB}" type="datetimeFigureOut">
               <a:rPr lang="en-CN" smtClean="0"/>
-              <a:t>2026/6/12</a:t>
+              <a:t>2026/6/13</a:t>
             </a:fld>
             <a:endParaRPr lang="en-CN"/>
           </a:p>
@@ -2402,7 +2407,7 @@
           <a:p>
             <a:fld id="{1C654D52-FA64-924F-BDBD-5D442C1F7DEB}" type="datetimeFigureOut">
               <a:rPr lang="en-CN" smtClean="0"/>
-              <a:t>2026/6/12</a:t>
+              <a:t>2026/6/13</a:t>
             </a:fld>
             <a:endParaRPr lang="en-CN"/>
           </a:p>
@@ -2691,7 +2696,7 @@
           <a:p>
             <a:fld id="{1C654D52-FA64-924F-BDBD-5D442C1F7DEB}" type="datetimeFigureOut">
               <a:rPr lang="en-CN" smtClean="0"/>
-              <a:t>2026/6/12</a:t>
+              <a:t>2026/6/13</a:t>
             </a:fld>
             <a:endParaRPr lang="en-CN"/>
           </a:p>
@@ -2934,7 +2939,7 @@
           <a:p>
             <a:fld id="{1C654D52-FA64-924F-BDBD-5D442C1F7DEB}" type="datetimeFigureOut">
               <a:rPr lang="en-CN" smtClean="0"/>
-              <a:t>2026/6/12</a:t>
+              <a:t>2026/6/13</a:t>
             </a:fld>
             <a:endParaRPr lang="en-CN"/>
           </a:p>
@@ -3826,13 +3831,7 @@
               <a:rPr lang="en-CN" sz="2000" dirty="0">
                 <a:latin typeface="Charter Roman" panose="02040503050506020203" pitchFamily="18" charset="0"/>
               </a:rPr>
-              <a:t>EEG is good for </a:t>
-            </a:r>
-            <a:r>
-              <a:rPr lang="en-CN" sz="2000" dirty="0">
-                <a:latin typeface="Charter Roman" panose="02040503050506020203" pitchFamily="18" charset="0"/>
-              </a:rPr>
-              <a:t>our questions. So…</a:t>
+              <a:t>EEG is good for our questions. So…</a:t>
             </a:r>
           </a:p>
         </p:txBody>
@@ -3938,7 +3937,7 @@
         <p:spPr>
           <a:xfrm>
             <a:off x="6294474" y="374465"/>
-            <a:ext cx="5105885" cy="2677656"/>
+            <a:ext cx="5290231" cy="2677656"/>
           </a:xfrm>
           <a:prstGeom prst="rect">
             <a:avLst/>
@@ -3968,19 +3967,27 @@
               <a:rPr lang="en-CN" sz="2400" dirty="0">
                 <a:latin typeface="Charter Roman" panose="02040503050506020203" pitchFamily="18" charset="0"/>
               </a:rPr>
-              <a:t>    What devices </a:t>
+              <a:t>    What devices should I</a:t>
+            </a:r>
+            <a:r>
+              <a:rPr lang="zh-CN" altLang="en-US" sz="2400" dirty="0">
+                <a:latin typeface="Charter Roman" panose="02040503050506020203" pitchFamily="18" charset="0"/>
+              </a:rPr>
+              <a:t> </a:t>
             </a:r>
             <a:r>
               <a:rPr lang="en-CN" sz="2400" dirty="0">
                 <a:latin typeface="Charter Roman" panose="02040503050506020203" pitchFamily="18" charset="0"/>
               </a:rPr>
-              <a:t>should </a:t>
-            </a:r>
+              <a:t>know about?</a:t>
+            </a:r>
+          </a:p>
+          <a:p>
             <a:r>
               <a:rPr lang="en-CN" sz="2400" dirty="0">
                 <a:latin typeface="Charter Roman" panose="02040503050506020203" pitchFamily="18" charset="0"/>
               </a:rPr>
-              <a:t>know about?</a:t>
+              <a:t>    How should I use them correctly?</a:t>
             </a:r>
           </a:p>
           <a:p>
@@ -3988,7 +3995,7 @@
               <a:rPr lang="en-CN" sz="2400" dirty="0">
                 <a:latin typeface="Charter Roman" panose="02040503050506020203" pitchFamily="18" charset="0"/>
               </a:rPr>
-              <a:t>    How should I use them correctly?</a:t>
+              <a:t>    How to collect a nice data?</a:t>
             </a:r>
           </a:p>
           <a:p>
@@ -3996,21 +4003,7 @@
               <a:rPr lang="en-CN" sz="2400" dirty="0">
                 <a:latin typeface="Charter Roman" panose="02040503050506020203" pitchFamily="18" charset="0"/>
               </a:rPr>
-              <a:t>    How to collect a nice data?</a:t>
-            </a:r>
-          </a:p>
-          <a:p>
-            <a:r>
-              <a:rPr lang="en-CN" sz="2400" dirty="0">
-                <a:latin typeface="Charter Roman" panose="02040503050506020203" pitchFamily="18" charset="0"/>
-              </a:rPr>
-              <a:t>    </a:t>
-            </a:r>
-            <a:r>
-              <a:rPr lang="en-CN" sz="2400" dirty="0">
-                <a:latin typeface="Charter Roman" panose="02040503050506020203" pitchFamily="18" charset="0"/>
-              </a:rPr>
-              <a:t>…</a:t>
+              <a:t>    …</a:t>
             </a:r>
           </a:p>
           <a:p>
@@ -6095,9 +6088,6 @@
               </a:rPr>
               <a:t>nput: (30_subject, 50_windows)</a:t>
             </a:r>
-            <a:endParaRPr lang="en-CN" dirty="0">
-              <a:latin typeface="Charter Roman" panose="02040503050506020203" pitchFamily="18" charset="0"/>
-            </a:endParaRPr>
           </a:p>
         </p:txBody>
       </p:sp>
@@ -6955,13 +6945,7 @@
               <a:rPr lang="en-CN" sz="3200" dirty="0">
                 <a:latin typeface="Charter Roman" panose="02040503050506020203" pitchFamily="18" charset="0"/>
               </a:rPr>
-              <a:t>MNE-MC</a:t>
-            </a:r>
-            <a:r>
-              <a:rPr lang="en-CN" sz="3200" dirty="0">
-                <a:latin typeface="Charter Roman" panose="02040503050506020203" pitchFamily="18" charset="0"/>
-              </a:rPr>
-              <a:t>P</a:t>
+              <a:t>MNE-MCP</a:t>
             </a:r>
           </a:p>
         </p:txBody>
@@ -7113,13 +7097,7 @@
               <a:rPr lang="en-CN" dirty="0">
                 <a:latin typeface="Charter Roman" panose="02040503050506020203" pitchFamily="18" charset="0"/>
               </a:rPr>
-              <a:t>pipx install "mne-mcp[full]" </a:t>
-            </a:r>
-            <a:r>
-              <a:rPr lang="en-CN" dirty="0">
-                <a:latin typeface="Charter Roman" panose="02040503050506020203" pitchFamily="18" charset="0"/>
-              </a:rPr>
-              <a:t>-- </a:t>
+              <a:t>pipx install "mne-mcp[full]" -- </a:t>
             </a:r>
             <a:r>
               <a:rPr lang="en-US" altLang="zh-CN" dirty="0">
